--- a/Истоки становления политической культуры.pptx
+++ b/Истоки становления политической культуры.pptx
@@ -32,7 +32,7 @@
       <p:boldItalic r:id="rId18"/>
     </p:embeddedFont>
     <p:embeddedFont>
-      <p:font typeface="Merriweather" panose="020B0604020202020204" pitchFamily="2" charset="-52"/>
+      <p:font typeface="Merriweather" panose="00000500000000000000" pitchFamily="2" charset="-52"/>
       <p:regular r:id="rId19"/>
       <p:bold r:id="rId20"/>
       <p:italic r:id="rId21"/>
@@ -1218,8 +1218,8 @@
         </p:nvSpPr>
         <p:spPr>
           <a:xfrm>
-            <a:off x="1143225" y="685800"/>
-            <a:ext cx="4572225" cy="3429000"/>
+            <a:off x="381000" y="685800"/>
+            <a:ext cx="6096000" cy="3429000"/>
           </a:xfrm>
           <a:custGeom>
             <a:avLst/>
@@ -13372,11 +13372,17 @@
         <p:nvGraphicFramePr>
           <p:cNvPr id="97" name="Google Shape;97;p14"/>
           <p:cNvGraphicFramePr/>
-          <p:nvPr/>
+          <p:nvPr>
+            <p:extLst>
+              <p:ext uri="{D42A27DB-BD31-4B8C-83A1-F6EECF244321}">
+                <p14:modId xmlns:p14="http://schemas.microsoft.com/office/powerpoint/2010/main" val="3367857272"/>
+              </p:ext>
+            </p:extLst>
+          </p:nvPr>
         </p:nvGraphicFramePr>
         <p:xfrm>
           <a:off x="571500" y="2071687"/>
-          <a:ext cx="3000000" cy="3000000"/>
+          <a:ext cx="11049000" cy="3590875"/>
         </p:xfrm>
         <a:graphic>
           <a:graphicData uri="http://schemas.openxmlformats.org/drawingml/2006/table">
@@ -14218,7 +14224,7 @@
                         <a:buNone/>
                       </a:pPr>
                       <a:r>
-                        <a:rPr lang="en-US" sz="1500" b="0" i="0" u="none" strike="noStrike" cap="none">
+                        <a:rPr lang="ru-RU" sz="1500" b="0" i="0" u="none" strike="noStrike" cap="none" dirty="0">
                           <a:solidFill>
                             <a:srgbClr val="1E293B"/>
                           </a:solidFill>
@@ -14227,9 +14233,9 @@
                           <a:cs typeface="Roboto"/>
                           <a:sym typeface="Roboto"/>
                         </a:rPr>
-                        <a:t>Список</a:t>
+                        <a:t>Источники</a:t>
                       </a:r>
-                      <a:endParaRPr/>
+                      <a:endParaRPr dirty="0"/>
                     </a:p>
                   </a:txBody>
                   <a:tcPr marL="63500" marR="63500" marT="25400" marB="25400" anchor="ctr">
@@ -14294,7 +14300,7 @@
                         <a:buNone/>
                       </a:pPr>
                       <a:r>
-                        <a:rPr lang="en-US" sz="1500" b="0" i="0" u="none" strike="noStrike" cap="none">
+                        <a:rPr lang="en-US" sz="1500" b="0" i="0" u="none" strike="noStrike" cap="none" dirty="0" err="1">
                           <a:solidFill>
                             <a:srgbClr val="1E293B"/>
                           </a:solidFill>
@@ -14303,9 +14309,57 @@
                           <a:cs typeface="Roboto"/>
                           <a:sym typeface="Roboto"/>
                         </a:rPr>
-                        <a:t>Библиографический список источников</a:t>
+                        <a:t>Библиографический</a:t>
                       </a:r>
-                      <a:endParaRPr/>
+                      <a:r>
+                        <a:rPr lang="en-US" sz="1500" b="0" i="0" u="none" strike="noStrike" cap="none" dirty="0">
+                          <a:solidFill>
+                            <a:srgbClr val="1E293B"/>
+                          </a:solidFill>
+                          <a:latin typeface="Roboto"/>
+                          <a:ea typeface="Roboto"/>
+                          <a:cs typeface="Roboto"/>
+                          <a:sym typeface="Roboto"/>
+                        </a:rPr>
+                        <a:t> </a:t>
+                      </a:r>
+                      <a:r>
+                        <a:rPr lang="en-US" sz="1500" b="0" i="0" u="none" strike="noStrike" cap="none" dirty="0" err="1">
+                          <a:solidFill>
+                            <a:srgbClr val="1E293B"/>
+                          </a:solidFill>
+                          <a:latin typeface="Roboto"/>
+                          <a:ea typeface="Roboto"/>
+                          <a:cs typeface="Roboto"/>
+                          <a:sym typeface="Roboto"/>
+                        </a:rPr>
+                        <a:t>список</a:t>
+                      </a:r>
+                      <a:r>
+                        <a:rPr lang="en-US" sz="1500" b="0" i="0" u="none" strike="noStrike" cap="none" dirty="0">
+                          <a:solidFill>
+                            <a:srgbClr val="1E293B"/>
+                          </a:solidFill>
+                          <a:latin typeface="Roboto"/>
+                          <a:ea typeface="Roboto"/>
+                          <a:cs typeface="Roboto"/>
+                          <a:sym typeface="Roboto"/>
+                        </a:rPr>
+                        <a:t> </a:t>
+                      </a:r>
+                      <a:r>
+                        <a:rPr lang="en-US" sz="1500" b="0" i="0" u="none" strike="noStrike" cap="none" dirty="0" err="1">
+                          <a:solidFill>
+                            <a:srgbClr val="1E293B"/>
+                          </a:solidFill>
+                          <a:latin typeface="Roboto"/>
+                          <a:ea typeface="Roboto"/>
+                          <a:cs typeface="Roboto"/>
+                          <a:sym typeface="Roboto"/>
+                        </a:rPr>
+                        <a:t>источников</a:t>
+                      </a:r>
+                      <a:endParaRPr dirty="0"/>
                     </a:p>
                   </a:txBody>
                   <a:tcPr marL="63500" marR="63500" marT="25400" marB="25400" anchor="ctr">
